--- a/Lecture Resources/Lecture Powerpoints/Chunk 11 - Reading and Writing Data.pptx
+++ b/Lecture Resources/Lecture Powerpoints/Chunk 11 - Reading and Writing Data.pptx
@@ -132,6 +132,99 @@
 
 <file path=ppt/changesInfos/changesInfo1.xml><?xml version="1.0" encoding="utf-8"?>
 <pc:chgInfo xmlns:a="http://schemas.openxmlformats.org/drawingml/2006/main" xmlns:r="http://schemas.openxmlformats.org/officeDocument/2006/relationships" xmlns:ac="http://schemas.microsoft.com/office/drawing/2013/main/command" xmlns:pc="http://schemas.microsoft.com/office/powerpoint/2013/main/command">
+  <pc:docChgLst>
+    <pc:chgData name="Jonathan Bollig" userId="8b5d0afe-f106-45e0-8c3f-fd98fa124db1" providerId="ADAL" clId="{891409C9-2319-433B-8001-2E1CE368518E}"/>
+    <pc:docChg chg="custSel addSld delSld modSld">
+      <pc:chgData name="Jonathan Bollig" userId="8b5d0afe-f106-45e0-8c3f-fd98fa124db1" providerId="ADAL" clId="{891409C9-2319-433B-8001-2E1CE368518E}" dt="2025-08-18T13:33:56.347" v="46" actId="47"/>
+      <pc:docMkLst>
+        <pc:docMk/>
+      </pc:docMkLst>
+      <pc:sldChg chg="modSp mod">
+        <pc:chgData name="Jonathan Bollig" userId="8b5d0afe-f106-45e0-8c3f-fd98fa124db1" providerId="ADAL" clId="{891409C9-2319-433B-8001-2E1CE368518E}" dt="2025-08-18T10:03:07.320" v="7" actId="20577"/>
+        <pc:sldMkLst>
+          <pc:docMk/>
+          <pc:sldMk cId="836289018" sldId="256"/>
+        </pc:sldMkLst>
+      </pc:sldChg>
+      <pc:sldChg chg="del">
+        <pc:chgData name="Jonathan Bollig" userId="8b5d0afe-f106-45e0-8c3f-fd98fa124db1" providerId="ADAL" clId="{891409C9-2319-433B-8001-2E1CE368518E}" dt="2025-08-18T09:57:07.527" v="0" actId="47"/>
+        <pc:sldMkLst>
+          <pc:docMk/>
+          <pc:sldMk cId="3656329933" sldId="257"/>
+        </pc:sldMkLst>
+      </pc:sldChg>
+      <pc:sldChg chg="del">
+        <pc:chgData name="Jonathan Bollig" userId="8b5d0afe-f106-45e0-8c3f-fd98fa124db1" providerId="ADAL" clId="{891409C9-2319-433B-8001-2E1CE368518E}" dt="2025-08-18T09:57:07.527" v="0" actId="47"/>
+        <pc:sldMkLst>
+          <pc:docMk/>
+          <pc:sldMk cId="544279955" sldId="258"/>
+        </pc:sldMkLst>
+      </pc:sldChg>
+      <pc:sldChg chg="delSp modSp del mod">
+        <pc:chgData name="Jonathan Bollig" userId="8b5d0afe-f106-45e0-8c3f-fd98fa124db1" providerId="ADAL" clId="{891409C9-2319-433B-8001-2E1CE368518E}" dt="2025-08-18T13:33:56.347" v="46" actId="47"/>
+        <pc:sldMkLst>
+          <pc:docMk/>
+          <pc:sldMk cId="2169503629" sldId="259"/>
+        </pc:sldMkLst>
+      </pc:sldChg>
+      <pc:sldChg chg="add">
+        <pc:chgData name="Jonathan Bollig" userId="8b5d0afe-f106-45e0-8c3f-fd98fa124db1" providerId="ADAL" clId="{891409C9-2319-433B-8001-2E1CE368518E}" dt="2025-08-18T13:33:54.473" v="45"/>
+        <pc:sldMkLst>
+          <pc:docMk/>
+          <pc:sldMk cId="932306145" sldId="260"/>
+        </pc:sldMkLst>
+      </pc:sldChg>
+      <pc:sldChg chg="del">
+        <pc:chgData name="Jonathan Bollig" userId="8b5d0afe-f106-45e0-8c3f-fd98fa124db1" providerId="ADAL" clId="{891409C9-2319-433B-8001-2E1CE368518E}" dt="2025-08-18T09:57:07.527" v="0" actId="47"/>
+        <pc:sldMkLst>
+          <pc:docMk/>
+          <pc:sldMk cId="2533283895" sldId="260"/>
+        </pc:sldMkLst>
+      </pc:sldChg>
+      <pc:sldChg chg="del">
+        <pc:chgData name="Jonathan Bollig" userId="8b5d0afe-f106-45e0-8c3f-fd98fa124db1" providerId="ADAL" clId="{891409C9-2319-433B-8001-2E1CE368518E}" dt="2025-08-18T09:57:07.527" v="0" actId="47"/>
+        <pc:sldMkLst>
+          <pc:docMk/>
+          <pc:sldMk cId="847849653" sldId="261"/>
+        </pc:sldMkLst>
+      </pc:sldChg>
+      <pc:sldChg chg="del">
+        <pc:chgData name="Jonathan Bollig" userId="8b5d0afe-f106-45e0-8c3f-fd98fa124db1" providerId="ADAL" clId="{891409C9-2319-433B-8001-2E1CE368518E}" dt="2025-08-18T09:57:07.527" v="0" actId="47"/>
+        <pc:sldMkLst>
+          <pc:docMk/>
+          <pc:sldMk cId="1908144578" sldId="262"/>
+        </pc:sldMkLst>
+      </pc:sldChg>
+      <pc:sldChg chg="del">
+        <pc:chgData name="Jonathan Bollig" userId="8b5d0afe-f106-45e0-8c3f-fd98fa124db1" providerId="ADAL" clId="{891409C9-2319-433B-8001-2E1CE368518E}" dt="2025-08-18T09:57:07.527" v="0" actId="47"/>
+        <pc:sldMkLst>
+          <pc:docMk/>
+          <pc:sldMk cId="4076698392" sldId="263"/>
+        </pc:sldMkLst>
+      </pc:sldChg>
+      <pc:sldChg chg="del">
+        <pc:chgData name="Jonathan Bollig" userId="8b5d0afe-f106-45e0-8c3f-fd98fa124db1" providerId="ADAL" clId="{891409C9-2319-433B-8001-2E1CE368518E}" dt="2025-08-18T09:57:07.527" v="0" actId="47"/>
+        <pc:sldMkLst>
+          <pc:docMk/>
+          <pc:sldMk cId="3708449378" sldId="264"/>
+        </pc:sldMkLst>
+      </pc:sldChg>
+      <pc:sldChg chg="del">
+        <pc:chgData name="Jonathan Bollig" userId="8b5d0afe-f106-45e0-8c3f-fd98fa124db1" providerId="ADAL" clId="{891409C9-2319-433B-8001-2E1CE368518E}" dt="2025-08-18T09:57:07.527" v="0" actId="47"/>
+        <pc:sldMkLst>
+          <pc:docMk/>
+          <pc:sldMk cId="933916611" sldId="265"/>
+        </pc:sldMkLst>
+      </pc:sldChg>
+      <pc:sldChg chg="del">
+        <pc:chgData name="Jonathan Bollig" userId="8b5d0afe-f106-45e0-8c3f-fd98fa124db1" providerId="ADAL" clId="{891409C9-2319-433B-8001-2E1CE368518E}" dt="2025-08-18T09:57:07.527" v="0" actId="47"/>
+        <pc:sldMkLst>
+          <pc:docMk/>
+          <pc:sldMk cId="2117799034" sldId="266"/>
+        </pc:sldMkLst>
+      </pc:sldChg>
+    </pc:docChg>
+  </pc:docChgLst>
   <pc:docChgLst>
     <pc:chgData name="Jonathan Bollig" userId="8b5d0afe-f106-45e0-8c3f-fd98fa124db1" providerId="ADAL" clId="{B108959E-8160-4214-BA0D-42D2F1070C03}"/>
     <pc:docChg chg="undo custSel addSld modSld sldOrd">
@@ -543,99 +636,6 @@
       </pc:sldChg>
     </pc:docChg>
   </pc:docChgLst>
-  <pc:docChgLst>
-    <pc:chgData name="Jonathan Bollig" userId="8b5d0afe-f106-45e0-8c3f-fd98fa124db1" providerId="ADAL" clId="{891409C9-2319-433B-8001-2E1CE368518E}"/>
-    <pc:docChg chg="custSel addSld delSld modSld">
-      <pc:chgData name="Jonathan Bollig" userId="8b5d0afe-f106-45e0-8c3f-fd98fa124db1" providerId="ADAL" clId="{891409C9-2319-433B-8001-2E1CE368518E}" dt="2025-08-18T13:33:56.347" v="46" actId="47"/>
-      <pc:docMkLst>
-        <pc:docMk/>
-      </pc:docMkLst>
-      <pc:sldChg chg="modSp mod">
-        <pc:chgData name="Jonathan Bollig" userId="8b5d0afe-f106-45e0-8c3f-fd98fa124db1" providerId="ADAL" clId="{891409C9-2319-433B-8001-2E1CE368518E}" dt="2025-08-18T10:03:07.320" v="7" actId="20577"/>
-        <pc:sldMkLst>
-          <pc:docMk/>
-          <pc:sldMk cId="836289018" sldId="256"/>
-        </pc:sldMkLst>
-      </pc:sldChg>
-      <pc:sldChg chg="del">
-        <pc:chgData name="Jonathan Bollig" userId="8b5d0afe-f106-45e0-8c3f-fd98fa124db1" providerId="ADAL" clId="{891409C9-2319-433B-8001-2E1CE368518E}" dt="2025-08-18T09:57:07.527" v="0" actId="47"/>
-        <pc:sldMkLst>
-          <pc:docMk/>
-          <pc:sldMk cId="3656329933" sldId="257"/>
-        </pc:sldMkLst>
-      </pc:sldChg>
-      <pc:sldChg chg="del">
-        <pc:chgData name="Jonathan Bollig" userId="8b5d0afe-f106-45e0-8c3f-fd98fa124db1" providerId="ADAL" clId="{891409C9-2319-433B-8001-2E1CE368518E}" dt="2025-08-18T09:57:07.527" v="0" actId="47"/>
-        <pc:sldMkLst>
-          <pc:docMk/>
-          <pc:sldMk cId="544279955" sldId="258"/>
-        </pc:sldMkLst>
-      </pc:sldChg>
-      <pc:sldChg chg="delSp modSp del mod">
-        <pc:chgData name="Jonathan Bollig" userId="8b5d0afe-f106-45e0-8c3f-fd98fa124db1" providerId="ADAL" clId="{891409C9-2319-433B-8001-2E1CE368518E}" dt="2025-08-18T13:33:56.347" v="46" actId="47"/>
-        <pc:sldMkLst>
-          <pc:docMk/>
-          <pc:sldMk cId="2169503629" sldId="259"/>
-        </pc:sldMkLst>
-      </pc:sldChg>
-      <pc:sldChg chg="add">
-        <pc:chgData name="Jonathan Bollig" userId="8b5d0afe-f106-45e0-8c3f-fd98fa124db1" providerId="ADAL" clId="{891409C9-2319-433B-8001-2E1CE368518E}" dt="2025-08-18T13:33:54.473" v="45"/>
-        <pc:sldMkLst>
-          <pc:docMk/>
-          <pc:sldMk cId="932306145" sldId="260"/>
-        </pc:sldMkLst>
-      </pc:sldChg>
-      <pc:sldChg chg="del">
-        <pc:chgData name="Jonathan Bollig" userId="8b5d0afe-f106-45e0-8c3f-fd98fa124db1" providerId="ADAL" clId="{891409C9-2319-433B-8001-2E1CE368518E}" dt="2025-08-18T09:57:07.527" v="0" actId="47"/>
-        <pc:sldMkLst>
-          <pc:docMk/>
-          <pc:sldMk cId="2533283895" sldId="260"/>
-        </pc:sldMkLst>
-      </pc:sldChg>
-      <pc:sldChg chg="del">
-        <pc:chgData name="Jonathan Bollig" userId="8b5d0afe-f106-45e0-8c3f-fd98fa124db1" providerId="ADAL" clId="{891409C9-2319-433B-8001-2E1CE368518E}" dt="2025-08-18T09:57:07.527" v="0" actId="47"/>
-        <pc:sldMkLst>
-          <pc:docMk/>
-          <pc:sldMk cId="847849653" sldId="261"/>
-        </pc:sldMkLst>
-      </pc:sldChg>
-      <pc:sldChg chg="del">
-        <pc:chgData name="Jonathan Bollig" userId="8b5d0afe-f106-45e0-8c3f-fd98fa124db1" providerId="ADAL" clId="{891409C9-2319-433B-8001-2E1CE368518E}" dt="2025-08-18T09:57:07.527" v="0" actId="47"/>
-        <pc:sldMkLst>
-          <pc:docMk/>
-          <pc:sldMk cId="1908144578" sldId="262"/>
-        </pc:sldMkLst>
-      </pc:sldChg>
-      <pc:sldChg chg="del">
-        <pc:chgData name="Jonathan Bollig" userId="8b5d0afe-f106-45e0-8c3f-fd98fa124db1" providerId="ADAL" clId="{891409C9-2319-433B-8001-2E1CE368518E}" dt="2025-08-18T09:57:07.527" v="0" actId="47"/>
-        <pc:sldMkLst>
-          <pc:docMk/>
-          <pc:sldMk cId="4076698392" sldId="263"/>
-        </pc:sldMkLst>
-      </pc:sldChg>
-      <pc:sldChg chg="del">
-        <pc:chgData name="Jonathan Bollig" userId="8b5d0afe-f106-45e0-8c3f-fd98fa124db1" providerId="ADAL" clId="{891409C9-2319-433B-8001-2E1CE368518E}" dt="2025-08-18T09:57:07.527" v="0" actId="47"/>
-        <pc:sldMkLst>
-          <pc:docMk/>
-          <pc:sldMk cId="3708449378" sldId="264"/>
-        </pc:sldMkLst>
-      </pc:sldChg>
-      <pc:sldChg chg="del">
-        <pc:chgData name="Jonathan Bollig" userId="8b5d0afe-f106-45e0-8c3f-fd98fa124db1" providerId="ADAL" clId="{891409C9-2319-433B-8001-2E1CE368518E}" dt="2025-08-18T09:57:07.527" v="0" actId="47"/>
-        <pc:sldMkLst>
-          <pc:docMk/>
-          <pc:sldMk cId="933916611" sldId="265"/>
-        </pc:sldMkLst>
-      </pc:sldChg>
-      <pc:sldChg chg="del">
-        <pc:chgData name="Jonathan Bollig" userId="8b5d0afe-f106-45e0-8c3f-fd98fa124db1" providerId="ADAL" clId="{891409C9-2319-433B-8001-2E1CE368518E}" dt="2025-08-18T09:57:07.527" v="0" actId="47"/>
-        <pc:sldMkLst>
-          <pc:docMk/>
-          <pc:sldMk cId="2117799034" sldId="266"/>
-        </pc:sldMkLst>
-      </pc:sldChg>
-    </pc:docChg>
-  </pc:docChgLst>
 </pc:chgInfo>
 </file>
 
@@ -721,7 +721,7 @@
           <a:p>
             <a:fld id="{0B6CA2EE-5589-4682-AD7F-744DBF1E81F5}" type="datetimeFigureOut">
               <a:rPr lang="de-DE" smtClean="0"/>
-              <a:t>07.10.2025</a:t>
+              <a:t>09.10.2025</a:t>
             </a:fld>
             <a:endParaRPr lang="de-DE"/>
           </a:p>
@@ -879,7 +879,7 @@
           <a:p>
             <a:fld id="{11422C3B-6429-4381-8F08-B422F3CD22BF}" type="slidenum">
               <a:rPr lang="de-DE" smtClean="0"/>
-              <a:t>‹Nr.›</a:t>
+              <a:t>‹#›</a:t>
             </a:fld>
             <a:endParaRPr lang="de-DE"/>
           </a:p>
@@ -1225,7 +1225,7 @@
           <a:p>
             <a:fld id="{ADA51F25-4808-47F4-BF6E-BCDC230DB01C}" type="datetimeFigureOut">
               <a:rPr lang="de-DE" smtClean="0"/>
-              <a:t>07.10.2025</a:t>
+              <a:t>09.10.2025</a:t>
             </a:fld>
             <a:endParaRPr lang="de-DE"/>
           </a:p>
@@ -1279,7 +1279,7 @@
           <a:p>
             <a:fld id="{C018A060-D51C-4243-8F88-61D66D5570B8}" type="slidenum">
               <a:rPr lang="de-DE" smtClean="0"/>
-              <a:t>‹Nr.›</a:t>
+              <a:t>‹#›</a:t>
             </a:fld>
             <a:endParaRPr lang="de-DE"/>
           </a:p>
@@ -1423,7 +1423,7 @@
           <a:p>
             <a:fld id="{ADA51F25-4808-47F4-BF6E-BCDC230DB01C}" type="datetimeFigureOut">
               <a:rPr lang="de-DE" smtClean="0"/>
-              <a:t>07.10.2025</a:t>
+              <a:t>09.10.2025</a:t>
             </a:fld>
             <a:endParaRPr lang="de-DE"/>
           </a:p>
@@ -1477,7 +1477,7 @@
           <a:p>
             <a:fld id="{C018A060-D51C-4243-8F88-61D66D5570B8}" type="slidenum">
               <a:rPr lang="de-DE" smtClean="0"/>
-              <a:t>‹Nr.›</a:t>
+              <a:t>‹#›</a:t>
             </a:fld>
             <a:endParaRPr lang="de-DE"/>
           </a:p>
@@ -1631,7 +1631,7 @@
           <a:p>
             <a:fld id="{ADA51F25-4808-47F4-BF6E-BCDC230DB01C}" type="datetimeFigureOut">
               <a:rPr lang="de-DE" smtClean="0"/>
-              <a:t>07.10.2025</a:t>
+              <a:t>09.10.2025</a:t>
             </a:fld>
             <a:endParaRPr lang="de-DE"/>
           </a:p>
@@ -1685,7 +1685,7 @@
           <a:p>
             <a:fld id="{C018A060-D51C-4243-8F88-61D66D5570B8}" type="slidenum">
               <a:rPr lang="de-DE" smtClean="0"/>
-              <a:t>‹Nr.›</a:t>
+              <a:t>‹#›</a:t>
             </a:fld>
             <a:endParaRPr lang="de-DE"/>
           </a:p>
@@ -1829,7 +1829,7 @@
           <a:p>
             <a:fld id="{ADA51F25-4808-47F4-BF6E-BCDC230DB01C}" type="datetimeFigureOut">
               <a:rPr lang="de-DE" smtClean="0"/>
-              <a:t>07.10.2025</a:t>
+              <a:t>09.10.2025</a:t>
             </a:fld>
             <a:endParaRPr lang="de-DE"/>
           </a:p>
@@ -1883,7 +1883,7 @@
           <a:p>
             <a:fld id="{C018A060-D51C-4243-8F88-61D66D5570B8}" type="slidenum">
               <a:rPr lang="de-DE" smtClean="0"/>
-              <a:t>‹Nr.›</a:t>
+              <a:t>‹#›</a:t>
             </a:fld>
             <a:endParaRPr lang="de-DE"/>
           </a:p>
@@ -2104,7 +2104,7 @@
           <a:p>
             <a:fld id="{ADA51F25-4808-47F4-BF6E-BCDC230DB01C}" type="datetimeFigureOut">
               <a:rPr lang="de-DE" smtClean="0"/>
-              <a:t>07.10.2025</a:t>
+              <a:t>09.10.2025</a:t>
             </a:fld>
             <a:endParaRPr lang="de-DE"/>
           </a:p>
@@ -2158,7 +2158,7 @@
           <a:p>
             <a:fld id="{C018A060-D51C-4243-8F88-61D66D5570B8}" type="slidenum">
               <a:rPr lang="de-DE" smtClean="0"/>
-              <a:t>‹Nr.›</a:t>
+              <a:t>‹#›</a:t>
             </a:fld>
             <a:endParaRPr lang="de-DE"/>
           </a:p>
@@ -2369,7 +2369,7 @@
           <a:p>
             <a:fld id="{ADA51F25-4808-47F4-BF6E-BCDC230DB01C}" type="datetimeFigureOut">
               <a:rPr lang="de-DE" smtClean="0"/>
-              <a:t>07.10.2025</a:t>
+              <a:t>09.10.2025</a:t>
             </a:fld>
             <a:endParaRPr lang="de-DE"/>
           </a:p>
@@ -2423,7 +2423,7 @@
           <a:p>
             <a:fld id="{C018A060-D51C-4243-8F88-61D66D5570B8}" type="slidenum">
               <a:rPr lang="de-DE" smtClean="0"/>
-              <a:t>‹Nr.›</a:t>
+              <a:t>‹#›</a:t>
             </a:fld>
             <a:endParaRPr lang="de-DE"/>
           </a:p>
@@ -2781,7 +2781,7 @@
           <a:p>
             <a:fld id="{ADA51F25-4808-47F4-BF6E-BCDC230DB01C}" type="datetimeFigureOut">
               <a:rPr lang="de-DE" smtClean="0"/>
-              <a:t>07.10.2025</a:t>
+              <a:t>09.10.2025</a:t>
             </a:fld>
             <a:endParaRPr lang="de-DE"/>
           </a:p>
@@ -2835,7 +2835,7 @@
           <a:p>
             <a:fld id="{C018A060-D51C-4243-8F88-61D66D5570B8}" type="slidenum">
               <a:rPr lang="de-DE" smtClean="0"/>
-              <a:t>‹Nr.›</a:t>
+              <a:t>‹#›</a:t>
             </a:fld>
             <a:endParaRPr lang="de-DE"/>
           </a:p>
@@ -2922,7 +2922,7 @@
           <a:p>
             <a:fld id="{ADA51F25-4808-47F4-BF6E-BCDC230DB01C}" type="datetimeFigureOut">
               <a:rPr lang="de-DE" smtClean="0"/>
-              <a:t>07.10.2025</a:t>
+              <a:t>09.10.2025</a:t>
             </a:fld>
             <a:endParaRPr lang="de-DE"/>
           </a:p>
@@ -2976,7 +2976,7 @@
           <a:p>
             <a:fld id="{C018A060-D51C-4243-8F88-61D66D5570B8}" type="slidenum">
               <a:rPr lang="de-DE" smtClean="0"/>
-              <a:t>‹Nr.›</a:t>
+              <a:t>‹#›</a:t>
             </a:fld>
             <a:endParaRPr lang="de-DE"/>
           </a:p>
@@ -3035,7 +3035,7 @@
           <a:p>
             <a:fld id="{ADA51F25-4808-47F4-BF6E-BCDC230DB01C}" type="datetimeFigureOut">
               <a:rPr lang="de-DE" smtClean="0"/>
-              <a:t>07.10.2025</a:t>
+              <a:t>09.10.2025</a:t>
             </a:fld>
             <a:endParaRPr lang="de-DE"/>
           </a:p>
@@ -3089,7 +3089,7 @@
           <a:p>
             <a:fld id="{C018A060-D51C-4243-8F88-61D66D5570B8}" type="slidenum">
               <a:rPr lang="de-DE" smtClean="0"/>
-              <a:t>‹Nr.›</a:t>
+              <a:t>‹#›</a:t>
             </a:fld>
             <a:endParaRPr lang="de-DE"/>
           </a:p>
@@ -3346,7 +3346,7 @@
           <a:p>
             <a:fld id="{ADA51F25-4808-47F4-BF6E-BCDC230DB01C}" type="datetimeFigureOut">
               <a:rPr lang="de-DE" smtClean="0"/>
-              <a:t>07.10.2025</a:t>
+              <a:t>09.10.2025</a:t>
             </a:fld>
             <a:endParaRPr lang="de-DE"/>
           </a:p>
@@ -3400,7 +3400,7 @@
           <a:p>
             <a:fld id="{C018A060-D51C-4243-8F88-61D66D5570B8}" type="slidenum">
               <a:rPr lang="de-DE" smtClean="0"/>
-              <a:t>‹Nr.›</a:t>
+              <a:t>‹#›</a:t>
             </a:fld>
             <a:endParaRPr lang="de-DE"/>
           </a:p>
@@ -3634,7 +3634,7 @@
           <a:p>
             <a:fld id="{ADA51F25-4808-47F4-BF6E-BCDC230DB01C}" type="datetimeFigureOut">
               <a:rPr lang="de-DE" smtClean="0"/>
-              <a:t>07.10.2025</a:t>
+              <a:t>09.10.2025</a:t>
             </a:fld>
             <a:endParaRPr lang="de-DE"/>
           </a:p>
@@ -3688,7 +3688,7 @@
           <a:p>
             <a:fld id="{C018A060-D51C-4243-8F88-61D66D5570B8}" type="slidenum">
               <a:rPr lang="de-DE" smtClean="0"/>
-              <a:t>‹Nr.›</a:t>
+              <a:t>‹#›</a:t>
             </a:fld>
             <a:endParaRPr lang="de-DE"/>
           </a:p>
@@ -3875,7 +3875,7 @@
           <a:p>
             <a:fld id="{ADA51F25-4808-47F4-BF6E-BCDC230DB01C}" type="datetimeFigureOut">
               <a:rPr lang="de-DE" smtClean="0"/>
-              <a:t>07.10.2025</a:t>
+              <a:t>09.10.2025</a:t>
             </a:fld>
             <a:endParaRPr lang="de-DE"/>
           </a:p>
@@ -3965,7 +3965,7 @@
           <a:p>
             <a:fld id="{C018A060-D51C-4243-8F88-61D66D5570B8}" type="slidenum">
               <a:rPr lang="de-DE" smtClean="0"/>
-              <a:t>‹Nr.›</a:t>
+              <a:t>‹#›</a:t>
             </a:fld>
             <a:endParaRPr lang="de-DE"/>
           </a:p>
@@ -4310,8 +4310,8 @@
         </p:nvSpPr>
         <p:spPr>
           <a:xfrm>
-            <a:off x="868680" y="1122363"/>
-            <a:ext cx="10149840" cy="2387600"/>
+            <a:off x="880254" y="1712672"/>
+            <a:ext cx="10636555" cy="2387600"/>
           </a:xfrm>
         </p:spPr>
         <p:txBody>
@@ -4334,13 +4334,12 @@
             <a:br>
               <a:rPr lang="en-US" noProof="0" dirty="0"/>
             </a:br>
-            <a:r>
-              <a:rPr lang="en-US" noProof="0"/>
-              <a:t>Chunk 11: </a:t>
-            </a:r>
-            <a:r>
+            <a:br>
               <a:rPr lang="en-US" noProof="0" dirty="0"/>
-              <a:t>Reading and Writing Files</a:t>
+            </a:br>
+            <a:r>
+              <a:rPr lang="en-US" b="1" noProof="0" dirty="0"/>
+              <a:t>Chunk 11: Reading and Writing Files</a:t>
             </a:r>
           </a:p>
         </p:txBody>
@@ -4361,7 +4360,12 @@
             <p:ph type="subTitle" idx="1"/>
           </p:nvPr>
         </p:nvSpPr>
-        <p:spPr/>
+        <p:spPr>
+          <a:xfrm>
+            <a:off x="1524000" y="4736357"/>
+            <a:ext cx="9144000" cy="1655762"/>
+          </a:xfrm>
+        </p:spPr>
         <p:txBody>
           <a:bodyPr/>
           <a:lstStyle/>
@@ -4459,32 +4463,42 @@
         </p:nvSpPr>
         <p:spPr/>
         <p:txBody>
-          <a:bodyPr/>
+          <a:bodyPr>
+            <a:normAutofit/>
+          </a:bodyPr>
           <a:lstStyle/>
           <a:p>
             <a:r>
               <a:rPr lang="en-US" noProof="0" dirty="0"/>
               <a:t>“Normal” way:</a:t>
             </a:r>
-            <a:br>
-              <a:rPr lang="en-US" noProof="0" dirty="0"/>
-            </a:br>
+            <a:endParaRPr lang="en-US" dirty="0"/>
+          </a:p>
+          <a:p>
+            <a:pPr lvl="1">
+              <a:buFont typeface="Aptos" panose="020B0004020202020204" pitchFamily="34" charset="0"/>
+              <a:buChar char="→"/>
+            </a:pPr>
             <a:r>
               <a:rPr lang="en-US" noProof="0" dirty="0">
                 <a:sym typeface="Wingdings" panose="05000000000000000000" pitchFamily="2" charset="2"/>
               </a:rPr>
-              <a:t> Slow</a:t>
-            </a:r>
-            <a:br>
+              <a:t>Slow</a:t>
+            </a:r>
+            <a:endParaRPr lang="en-US" dirty="0">
+              <a:sym typeface="Wingdings" panose="05000000000000000000" pitchFamily="2" charset="2"/>
+            </a:endParaRPr>
+          </a:p>
+          <a:p>
+            <a:pPr lvl="1">
+              <a:buFont typeface="Aptos" panose="020B0004020202020204" pitchFamily="34" charset="0"/>
+              <a:buChar char="→"/>
+            </a:pPr>
+            <a:r>
               <a:rPr lang="en-US" noProof="0" dirty="0">
                 <a:sym typeface="Wingdings" panose="05000000000000000000" pitchFamily="2" charset="2"/>
               </a:rPr>
-            </a:br>
-            <a:r>
-              <a:rPr lang="en-US" noProof="0" dirty="0">
-                <a:sym typeface="Wingdings" panose="05000000000000000000" pitchFamily="2" charset="2"/>
-              </a:rPr>
-              <a:t> No conversion to </a:t>
+              <a:t>No conversion to </a:t>
             </a:r>
             <a:r>
               <a:rPr lang="en-US" noProof="0" dirty="0" err="1">
@@ -4508,25 +4522,33 @@
               <a:rPr lang="en-US" noProof="0" dirty="0"/>
               <a:t> Better way, works 90 % of time:</a:t>
             </a:r>
-            <a:br>
-              <a:rPr lang="en-US" noProof="0" dirty="0"/>
-            </a:br>
+            <a:endParaRPr lang="en-US" dirty="0"/>
+          </a:p>
+          <a:p>
+            <a:pPr lvl="1">
+              <a:buFont typeface="Aptos" panose="020B0004020202020204" pitchFamily="34" charset="0"/>
+              <a:buChar char="→"/>
+            </a:pPr>
             <a:r>
               <a:rPr lang="en-US" noProof="0" dirty="0">
                 <a:sym typeface="Wingdings" panose="05000000000000000000" pitchFamily="2" charset="2"/>
               </a:rPr>
-              <a:t> Lot of helpful options</a:t>
-            </a:r>
-            <a:br>
+              <a:t>Lot of helpful options</a:t>
+            </a:r>
+            <a:endParaRPr lang="en-US" dirty="0">
+              <a:sym typeface="Wingdings" panose="05000000000000000000" pitchFamily="2" charset="2"/>
+            </a:endParaRPr>
+          </a:p>
+          <a:p>
+            <a:pPr lvl="1">
+              <a:buFont typeface="Aptos" panose="020B0004020202020204" pitchFamily="34" charset="0"/>
+              <a:buChar char="→"/>
+            </a:pPr>
+            <a:r>
               <a:rPr lang="en-US" noProof="0" dirty="0">
                 <a:sym typeface="Wingdings" panose="05000000000000000000" pitchFamily="2" charset="2"/>
               </a:rPr>
-            </a:br>
-            <a:r>
-              <a:rPr lang="en-US" noProof="0" dirty="0">
-                <a:sym typeface="Wingdings" panose="05000000000000000000" pitchFamily="2" charset="2"/>
-              </a:rPr>
-              <a:t> Generates a </a:t>
+              <a:t>Generates a </a:t>
             </a:r>
             <a:r>
               <a:rPr lang="en-US" noProof="0" dirty="0" err="1">
@@ -4540,16 +4562,20 @@
               </a:rPr>
               <a:t> array</a:t>
             </a:r>
-            <a:br>
+            <a:endParaRPr lang="en-US" dirty="0">
+              <a:sym typeface="Wingdings" panose="05000000000000000000" pitchFamily="2" charset="2"/>
+            </a:endParaRPr>
+          </a:p>
+          <a:p>
+            <a:pPr lvl="1">
+              <a:buFont typeface="Aptos" panose="020B0004020202020204" pitchFamily="34" charset="0"/>
+              <a:buChar char="→"/>
+            </a:pPr>
+            <a:r>
               <a:rPr lang="en-US" noProof="0" dirty="0">
                 <a:sym typeface="Wingdings" panose="05000000000000000000" pitchFamily="2" charset="2"/>
               </a:rPr>
-            </a:br>
-            <a:r>
-              <a:rPr lang="en-US" noProof="0" dirty="0">
-                <a:sym typeface="Wingdings" panose="05000000000000000000" pitchFamily="2" charset="2"/>
-              </a:rPr>
-              <a:t> BUT: does not allow “,” as a </a:t>
+              <a:t>BUT: does not allow “,” as a </a:t>
             </a:r>
             <a:r>
               <a:rPr lang="en-US" dirty="0">
@@ -4641,8 +4667,8 @@
         </p:blipFill>
         <p:spPr>
           <a:xfrm>
-            <a:off x="3927348" y="5223495"/>
-            <a:ext cx="2923450" cy="1499822"/>
+            <a:off x="4151420" y="5285540"/>
+            <a:ext cx="2452528" cy="1258224"/>
           </a:xfrm>
           <a:prstGeom prst="rect">
             <a:avLst/>
@@ -4663,7 +4689,7 @@
         </p:nvSpPr>
         <p:spPr>
           <a:xfrm>
-            <a:off x="6850798" y="6312932"/>
+            <a:off x="6603948" y="6254508"/>
             <a:ext cx="4827155" cy="461665"/>
           </a:xfrm>
           <a:prstGeom prst="rect">
@@ -4796,6 +4822,299 @@
   <p:clrMapOvr>
     <a:masterClrMapping/>
   </p:clrMapOvr>
+  <p:timing>
+    <p:tnLst>
+      <p:par>
+        <p:cTn id="1" dur="indefinite" restart="never" nodeType="tmRoot">
+          <p:childTnLst>
+            <p:seq concurrent="1" nextAc="seek">
+              <p:cTn id="2" dur="indefinite" nodeType="mainSeq">
+                <p:childTnLst>
+                  <p:par>
+                    <p:cTn id="3" fill="hold">
+                      <p:stCondLst>
+                        <p:cond delay="indefinite"/>
+                      </p:stCondLst>
+                      <p:childTnLst>
+                        <p:par>
+                          <p:cTn id="4" fill="hold">
+                            <p:stCondLst>
+                              <p:cond delay="0"/>
+                            </p:stCondLst>
+                            <p:childTnLst>
+                              <p:par>
+                                <p:cTn id="5" presetID="1" presetClass="entr" presetSubtype="0" fill="hold" nodeType="clickEffect">
+                                  <p:stCondLst>
+                                    <p:cond delay="0"/>
+                                  </p:stCondLst>
+                                  <p:childTnLst>
+                                    <p:set>
+                                      <p:cBhvr>
+                                        <p:cTn id="6" dur="1" fill="hold">
+                                          <p:stCondLst>
+                                            <p:cond delay="0"/>
+                                          </p:stCondLst>
+                                        </p:cTn>
+                                        <p:tgtEl>
+                                          <p:spTgt spid="3">
+                                            <p:txEl>
+                                              <p:pRg st="3" end="3"/>
+                                            </p:txEl>
+                                          </p:spTgt>
+                                        </p:tgtEl>
+                                        <p:attrNameLst>
+                                          <p:attrName>style.visibility</p:attrName>
+                                        </p:attrNameLst>
+                                      </p:cBhvr>
+                                      <p:to>
+                                        <p:strVal val="visible"/>
+                                      </p:to>
+                                    </p:set>
+                                  </p:childTnLst>
+                                </p:cTn>
+                              </p:par>
+                              <p:par>
+                                <p:cTn id="7" presetID="1" presetClass="entr" presetSubtype="0" fill="hold" nodeType="withEffect">
+                                  <p:stCondLst>
+                                    <p:cond delay="0"/>
+                                  </p:stCondLst>
+                                  <p:childTnLst>
+                                    <p:set>
+                                      <p:cBhvr>
+                                        <p:cTn id="8" dur="1" fill="hold">
+                                          <p:stCondLst>
+                                            <p:cond delay="0"/>
+                                          </p:stCondLst>
+                                        </p:cTn>
+                                        <p:tgtEl>
+                                          <p:spTgt spid="3">
+                                            <p:txEl>
+                                              <p:pRg st="4" end="4"/>
+                                            </p:txEl>
+                                          </p:spTgt>
+                                        </p:tgtEl>
+                                        <p:attrNameLst>
+                                          <p:attrName>style.visibility</p:attrName>
+                                        </p:attrNameLst>
+                                      </p:cBhvr>
+                                      <p:to>
+                                        <p:strVal val="visible"/>
+                                      </p:to>
+                                    </p:set>
+                                  </p:childTnLst>
+                                </p:cTn>
+                              </p:par>
+                              <p:par>
+                                <p:cTn id="9" presetID="1" presetClass="entr" presetSubtype="0" fill="hold" nodeType="withEffect">
+                                  <p:stCondLst>
+                                    <p:cond delay="0"/>
+                                  </p:stCondLst>
+                                  <p:childTnLst>
+                                    <p:set>
+                                      <p:cBhvr>
+                                        <p:cTn id="10" dur="1" fill="hold">
+                                          <p:stCondLst>
+                                            <p:cond delay="0"/>
+                                          </p:stCondLst>
+                                        </p:cTn>
+                                        <p:tgtEl>
+                                          <p:spTgt spid="3">
+                                            <p:txEl>
+                                              <p:pRg st="5" end="5"/>
+                                            </p:txEl>
+                                          </p:spTgt>
+                                        </p:tgtEl>
+                                        <p:attrNameLst>
+                                          <p:attrName>style.visibility</p:attrName>
+                                        </p:attrNameLst>
+                                      </p:cBhvr>
+                                      <p:to>
+                                        <p:strVal val="visible"/>
+                                      </p:to>
+                                    </p:set>
+                                  </p:childTnLst>
+                                </p:cTn>
+                              </p:par>
+                              <p:par>
+                                <p:cTn id="11" presetID="1" presetClass="entr" presetSubtype="0" fill="hold" nodeType="withEffect">
+                                  <p:stCondLst>
+                                    <p:cond delay="0"/>
+                                  </p:stCondLst>
+                                  <p:childTnLst>
+                                    <p:set>
+                                      <p:cBhvr>
+                                        <p:cTn id="12" dur="1" fill="hold">
+                                          <p:stCondLst>
+                                            <p:cond delay="0"/>
+                                          </p:stCondLst>
+                                        </p:cTn>
+                                        <p:tgtEl>
+                                          <p:spTgt spid="7"/>
+                                        </p:tgtEl>
+                                        <p:attrNameLst>
+                                          <p:attrName>style.visibility</p:attrName>
+                                        </p:attrNameLst>
+                                      </p:cBhvr>
+                                      <p:to>
+                                        <p:strVal val="visible"/>
+                                      </p:to>
+                                    </p:set>
+                                  </p:childTnLst>
+                                </p:cTn>
+                              </p:par>
+                            </p:childTnLst>
+                          </p:cTn>
+                        </p:par>
+                      </p:childTnLst>
+                    </p:cTn>
+                  </p:par>
+                  <p:par>
+                    <p:cTn id="13" fill="hold">
+                      <p:stCondLst>
+                        <p:cond delay="indefinite"/>
+                      </p:stCondLst>
+                      <p:childTnLst>
+                        <p:par>
+                          <p:cTn id="14" fill="hold">
+                            <p:stCondLst>
+                              <p:cond delay="0"/>
+                            </p:stCondLst>
+                            <p:childTnLst>
+                              <p:par>
+                                <p:cTn id="15" presetID="1" presetClass="entr" presetSubtype="0" fill="hold" nodeType="clickEffect">
+                                  <p:stCondLst>
+                                    <p:cond delay="0"/>
+                                  </p:stCondLst>
+                                  <p:childTnLst>
+                                    <p:set>
+                                      <p:cBhvr>
+                                        <p:cTn id="16" dur="1" fill="hold">
+                                          <p:stCondLst>
+                                            <p:cond delay="0"/>
+                                          </p:stCondLst>
+                                        </p:cTn>
+                                        <p:tgtEl>
+                                          <p:spTgt spid="3">
+                                            <p:txEl>
+                                              <p:pRg st="6" end="6"/>
+                                            </p:txEl>
+                                          </p:spTgt>
+                                        </p:tgtEl>
+                                        <p:attrNameLst>
+                                          <p:attrName>style.visibility</p:attrName>
+                                        </p:attrNameLst>
+                                      </p:cBhvr>
+                                      <p:to>
+                                        <p:strVal val="visible"/>
+                                      </p:to>
+                                    </p:set>
+                                  </p:childTnLst>
+                                </p:cTn>
+                              </p:par>
+                            </p:childTnLst>
+                          </p:cTn>
+                        </p:par>
+                      </p:childTnLst>
+                    </p:cTn>
+                  </p:par>
+                  <p:par>
+                    <p:cTn id="17" fill="hold">
+                      <p:stCondLst>
+                        <p:cond delay="indefinite"/>
+                      </p:stCondLst>
+                      <p:childTnLst>
+                        <p:par>
+                          <p:cTn id="18" fill="hold">
+                            <p:stCondLst>
+                              <p:cond delay="0"/>
+                            </p:stCondLst>
+                            <p:childTnLst>
+                              <p:par>
+                                <p:cTn id="19" presetID="1" presetClass="entr" presetSubtype="0" fill="hold" nodeType="clickEffect">
+                                  <p:stCondLst>
+                                    <p:cond delay="0"/>
+                                  </p:stCondLst>
+                                  <p:childTnLst>
+                                    <p:set>
+                                      <p:cBhvr>
+                                        <p:cTn id="20" dur="1" fill="hold">
+                                          <p:stCondLst>
+                                            <p:cond delay="0"/>
+                                          </p:stCondLst>
+                                        </p:cTn>
+                                        <p:tgtEl>
+                                          <p:spTgt spid="3">
+                                            <p:txEl>
+                                              <p:pRg st="7" end="7"/>
+                                            </p:txEl>
+                                          </p:spTgt>
+                                        </p:tgtEl>
+                                        <p:attrNameLst>
+                                          <p:attrName>style.visibility</p:attrName>
+                                        </p:attrNameLst>
+                                      </p:cBhvr>
+                                      <p:to>
+                                        <p:strVal val="visible"/>
+                                      </p:to>
+                                    </p:set>
+                                  </p:childTnLst>
+                                </p:cTn>
+                              </p:par>
+                              <p:par>
+                                <p:cTn id="21" presetID="1" presetClass="entr" presetSubtype="0" fill="hold" nodeType="withEffect">
+                                  <p:stCondLst>
+                                    <p:cond delay="0"/>
+                                  </p:stCondLst>
+                                  <p:childTnLst>
+                                    <p:set>
+                                      <p:cBhvr>
+                                        <p:cTn id="22" dur="1" fill="hold">
+                                          <p:stCondLst>
+                                            <p:cond delay="0"/>
+                                          </p:stCondLst>
+                                        </p:cTn>
+                                        <p:tgtEl>
+                                          <p:spTgt spid="9"/>
+                                        </p:tgtEl>
+                                        <p:attrNameLst>
+                                          <p:attrName>style.visibility</p:attrName>
+                                        </p:attrNameLst>
+                                      </p:cBhvr>
+                                      <p:to>
+                                        <p:strVal val="visible"/>
+                                      </p:to>
+                                    </p:set>
+                                  </p:childTnLst>
+                                </p:cTn>
+                              </p:par>
+                            </p:childTnLst>
+                          </p:cTn>
+                        </p:par>
+                      </p:childTnLst>
+                    </p:cTn>
+                  </p:par>
+                </p:childTnLst>
+              </p:cTn>
+              <p:prevCondLst>
+                <p:cond evt="onPrev" delay="0">
+                  <p:tgtEl>
+                    <p:sldTgt/>
+                  </p:tgtEl>
+                </p:cond>
+              </p:prevCondLst>
+              <p:nextCondLst>
+                <p:cond evt="onNext" delay="0">
+                  <p:tgtEl>
+                    <p:sldTgt/>
+                  </p:tgtEl>
+                </p:cond>
+              </p:nextCondLst>
+            </p:seq>
+          </p:childTnLst>
+        </p:cTn>
+      </p:par>
+    </p:tnLst>
+  </p:timing>
 </p:sld>
 </file>
 
@@ -4933,32 +5252,16 @@
               <a:t>Install in </a:t>
             </a:r>
             <a:r>
-              <a:rPr lang="en-US" dirty="0">
-                <a:highlight>
-                  <a:srgbClr val="C0C0C0"/>
-                </a:highlight>
-              </a:rPr>
+              <a:rPr lang="en-US" b="1" dirty="0"/>
               <a:t>Anaconda </a:t>
             </a:r>
             <a:r>
-              <a:rPr lang="en-US" dirty="0" err="1">
-                <a:highlight>
-                  <a:srgbClr val="C0C0C0"/>
-                </a:highlight>
-              </a:rPr>
+              <a:rPr lang="en-US" b="1" dirty="0" err="1"/>
               <a:t>Powershell</a:t>
             </a:r>
             <a:r>
-              <a:rPr lang="en-US" dirty="0">
-                <a:highlight>
-                  <a:srgbClr val="C0C0C0"/>
-                </a:highlight>
-              </a:rPr>
-              <a:t> Prompt</a:t>
-            </a:r>
-            <a:r>
-              <a:rPr lang="en-US" dirty="0"/>
-              <a:t>: </a:t>
+              <a:rPr lang="en-US" b="1" dirty="0"/>
+              <a:t> Prompt: </a:t>
             </a:r>
             <a:br>
               <a:rPr lang="en-US" dirty="0"/>
@@ -5072,6 +5375,161 @@
   <p:clrMapOvr>
     <a:masterClrMapping/>
   </p:clrMapOvr>
+  <p:timing>
+    <p:tnLst>
+      <p:par>
+        <p:cTn id="1" dur="indefinite" restart="never" nodeType="tmRoot">
+          <p:childTnLst>
+            <p:seq concurrent="1" nextAc="seek">
+              <p:cTn id="2" dur="indefinite" nodeType="mainSeq">
+                <p:childTnLst>
+                  <p:par>
+                    <p:cTn id="3" fill="hold">
+                      <p:stCondLst>
+                        <p:cond delay="indefinite"/>
+                      </p:stCondLst>
+                      <p:childTnLst>
+                        <p:par>
+                          <p:cTn id="4" fill="hold">
+                            <p:stCondLst>
+                              <p:cond delay="0"/>
+                            </p:stCondLst>
+                            <p:childTnLst>
+                              <p:par>
+                                <p:cTn id="5" presetID="1" presetClass="entr" presetSubtype="0" fill="hold" nodeType="clickEffect">
+                                  <p:stCondLst>
+                                    <p:cond delay="0"/>
+                                  </p:stCondLst>
+                                  <p:childTnLst>
+                                    <p:set>
+                                      <p:cBhvr>
+                                        <p:cTn id="6" dur="1" fill="hold">
+                                          <p:stCondLst>
+                                            <p:cond delay="0"/>
+                                          </p:stCondLst>
+                                        </p:cTn>
+                                        <p:tgtEl>
+                                          <p:spTgt spid="3">
+                                            <p:txEl>
+                                              <p:pRg st="3" end="3"/>
+                                            </p:txEl>
+                                          </p:spTgt>
+                                        </p:tgtEl>
+                                        <p:attrNameLst>
+                                          <p:attrName>style.visibility</p:attrName>
+                                        </p:attrNameLst>
+                                      </p:cBhvr>
+                                      <p:to>
+                                        <p:strVal val="visible"/>
+                                      </p:to>
+                                    </p:set>
+                                  </p:childTnLst>
+                                </p:cTn>
+                              </p:par>
+                            </p:childTnLst>
+                          </p:cTn>
+                        </p:par>
+                      </p:childTnLst>
+                    </p:cTn>
+                  </p:par>
+                  <p:par>
+                    <p:cTn id="7" fill="hold">
+                      <p:stCondLst>
+                        <p:cond delay="indefinite"/>
+                      </p:stCondLst>
+                      <p:childTnLst>
+                        <p:par>
+                          <p:cTn id="8" fill="hold">
+                            <p:stCondLst>
+                              <p:cond delay="0"/>
+                            </p:stCondLst>
+                            <p:childTnLst>
+                              <p:par>
+                                <p:cTn id="9" presetID="1" presetClass="entr" presetSubtype="0" fill="hold" nodeType="clickEffect">
+                                  <p:stCondLst>
+                                    <p:cond delay="0"/>
+                                  </p:stCondLst>
+                                  <p:childTnLst>
+                                    <p:set>
+                                      <p:cBhvr>
+                                        <p:cTn id="10" dur="1" fill="hold">
+                                          <p:stCondLst>
+                                            <p:cond delay="0"/>
+                                          </p:stCondLst>
+                                        </p:cTn>
+                                        <p:tgtEl>
+                                          <p:spTgt spid="3">
+                                            <p:txEl>
+                                              <p:pRg st="4" end="4"/>
+                                            </p:txEl>
+                                          </p:spTgt>
+                                        </p:tgtEl>
+                                        <p:attrNameLst>
+                                          <p:attrName>style.visibility</p:attrName>
+                                        </p:attrNameLst>
+                                      </p:cBhvr>
+                                      <p:to>
+                                        <p:strVal val="visible"/>
+                                      </p:to>
+                                    </p:set>
+                                  </p:childTnLst>
+                                </p:cTn>
+                              </p:par>
+                              <p:par>
+                                <p:cTn id="11" presetID="1" presetClass="entr" presetSubtype="0" fill="hold" nodeType="withEffect">
+                                  <p:stCondLst>
+                                    <p:cond delay="0"/>
+                                  </p:stCondLst>
+                                  <p:childTnLst>
+                                    <p:set>
+                                      <p:cBhvr>
+                                        <p:cTn id="12" dur="1" fill="hold">
+                                          <p:stCondLst>
+                                            <p:cond delay="0"/>
+                                          </p:stCondLst>
+                                        </p:cTn>
+                                        <p:tgtEl>
+                                          <p:spTgt spid="9"/>
+                                        </p:tgtEl>
+                                        <p:attrNameLst>
+                                          <p:attrName>style.visibility</p:attrName>
+                                        </p:attrNameLst>
+                                      </p:cBhvr>
+                                      <p:to>
+                                        <p:strVal val="visible"/>
+                                      </p:to>
+                                    </p:set>
+                                  </p:childTnLst>
+                                </p:cTn>
+                              </p:par>
+                            </p:childTnLst>
+                          </p:cTn>
+                        </p:par>
+                      </p:childTnLst>
+                    </p:cTn>
+                  </p:par>
+                </p:childTnLst>
+              </p:cTn>
+              <p:prevCondLst>
+                <p:cond evt="onPrev" delay="0">
+                  <p:tgtEl>
+                    <p:sldTgt/>
+                  </p:tgtEl>
+                </p:cond>
+              </p:prevCondLst>
+              <p:nextCondLst>
+                <p:cond evt="onNext" delay="0">
+                  <p:tgtEl>
+                    <p:sldTgt/>
+                  </p:tgtEl>
+                </p:cond>
+              </p:nextCondLst>
+            </p:seq>
+          </p:childTnLst>
+        </p:cTn>
+      </p:par>
+    </p:tnLst>
+  </p:timing>
 </p:sld>
 </file>
 
@@ -5332,6 +5790,388 @@
   <p:clrMapOvr>
     <a:masterClrMapping/>
   </p:clrMapOvr>
+  <p:timing>
+    <p:tnLst>
+      <p:par>
+        <p:cTn id="1" dur="indefinite" restart="never" nodeType="tmRoot">
+          <p:childTnLst>
+            <p:seq concurrent="1" nextAc="seek">
+              <p:cTn id="2" dur="indefinite" nodeType="mainSeq">
+                <p:childTnLst>
+                  <p:par>
+                    <p:cTn id="3" fill="hold">
+                      <p:stCondLst>
+                        <p:cond delay="indefinite"/>
+                      </p:stCondLst>
+                      <p:childTnLst>
+                        <p:par>
+                          <p:cTn id="4" fill="hold">
+                            <p:stCondLst>
+                              <p:cond delay="0"/>
+                            </p:stCondLst>
+                            <p:childTnLst>
+                              <p:par>
+                                <p:cTn id="5" presetID="1" presetClass="entr" presetSubtype="0" fill="hold" nodeType="clickEffect">
+                                  <p:stCondLst>
+                                    <p:cond delay="0"/>
+                                  </p:stCondLst>
+                                  <p:childTnLst>
+                                    <p:set>
+                                      <p:cBhvr>
+                                        <p:cTn id="6" dur="1" fill="hold">
+                                          <p:stCondLst>
+                                            <p:cond delay="0"/>
+                                          </p:stCondLst>
+                                        </p:cTn>
+                                        <p:tgtEl>
+                                          <p:spTgt spid="3">
+                                            <p:txEl>
+                                              <p:pRg st="1" end="1"/>
+                                            </p:txEl>
+                                          </p:spTgt>
+                                        </p:tgtEl>
+                                        <p:attrNameLst>
+                                          <p:attrName>style.visibility</p:attrName>
+                                        </p:attrNameLst>
+                                      </p:cBhvr>
+                                      <p:to>
+                                        <p:strVal val="visible"/>
+                                      </p:to>
+                                    </p:set>
+                                  </p:childTnLst>
+                                </p:cTn>
+                              </p:par>
+                            </p:childTnLst>
+                          </p:cTn>
+                        </p:par>
+                      </p:childTnLst>
+                    </p:cTn>
+                  </p:par>
+                  <p:par>
+                    <p:cTn id="7" fill="hold">
+                      <p:stCondLst>
+                        <p:cond delay="indefinite"/>
+                      </p:stCondLst>
+                      <p:childTnLst>
+                        <p:par>
+                          <p:cTn id="8" fill="hold">
+                            <p:stCondLst>
+                              <p:cond delay="0"/>
+                            </p:stCondLst>
+                            <p:childTnLst>
+                              <p:par>
+                                <p:cTn id="9" presetID="1" presetClass="entr" presetSubtype="0" fill="hold" nodeType="clickEffect">
+                                  <p:stCondLst>
+                                    <p:cond delay="0"/>
+                                  </p:stCondLst>
+                                  <p:childTnLst>
+                                    <p:set>
+                                      <p:cBhvr>
+                                        <p:cTn id="10" dur="1" fill="hold">
+                                          <p:stCondLst>
+                                            <p:cond delay="0"/>
+                                          </p:stCondLst>
+                                        </p:cTn>
+                                        <p:tgtEl>
+                                          <p:spTgt spid="3">
+                                            <p:txEl>
+                                              <p:pRg st="2" end="2"/>
+                                            </p:txEl>
+                                          </p:spTgt>
+                                        </p:tgtEl>
+                                        <p:attrNameLst>
+                                          <p:attrName>style.visibility</p:attrName>
+                                        </p:attrNameLst>
+                                      </p:cBhvr>
+                                      <p:to>
+                                        <p:strVal val="visible"/>
+                                      </p:to>
+                                    </p:set>
+                                  </p:childTnLst>
+                                </p:cTn>
+                              </p:par>
+                              <p:par>
+                                <p:cTn id="11" presetID="1" presetClass="entr" presetSubtype="0" fill="hold" nodeType="withEffect">
+                                  <p:stCondLst>
+                                    <p:cond delay="0"/>
+                                  </p:stCondLst>
+                                  <p:childTnLst>
+                                    <p:set>
+                                      <p:cBhvr>
+                                        <p:cTn id="12" dur="1" fill="hold">
+                                          <p:stCondLst>
+                                            <p:cond delay="0"/>
+                                          </p:stCondLst>
+                                        </p:cTn>
+                                        <p:tgtEl>
+                                          <p:spTgt spid="3">
+                                            <p:txEl>
+                                              <p:pRg st="3" end="3"/>
+                                            </p:txEl>
+                                          </p:spTgt>
+                                        </p:tgtEl>
+                                        <p:attrNameLst>
+                                          <p:attrName>style.visibility</p:attrName>
+                                        </p:attrNameLst>
+                                      </p:cBhvr>
+                                      <p:to>
+                                        <p:strVal val="visible"/>
+                                      </p:to>
+                                    </p:set>
+                                  </p:childTnLst>
+                                </p:cTn>
+                              </p:par>
+                            </p:childTnLst>
+                          </p:cTn>
+                        </p:par>
+                      </p:childTnLst>
+                    </p:cTn>
+                  </p:par>
+                  <p:par>
+                    <p:cTn id="13" fill="hold">
+                      <p:stCondLst>
+                        <p:cond delay="indefinite"/>
+                      </p:stCondLst>
+                      <p:childTnLst>
+                        <p:par>
+                          <p:cTn id="14" fill="hold">
+                            <p:stCondLst>
+                              <p:cond delay="0"/>
+                            </p:stCondLst>
+                            <p:childTnLst>
+                              <p:par>
+                                <p:cTn id="15" presetID="1" presetClass="entr" presetSubtype="0" fill="hold" nodeType="clickEffect">
+                                  <p:stCondLst>
+                                    <p:cond delay="0"/>
+                                  </p:stCondLst>
+                                  <p:childTnLst>
+                                    <p:set>
+                                      <p:cBhvr>
+                                        <p:cTn id="16" dur="1" fill="hold">
+                                          <p:stCondLst>
+                                            <p:cond delay="0"/>
+                                          </p:stCondLst>
+                                        </p:cTn>
+                                        <p:tgtEl>
+                                          <p:spTgt spid="3">
+                                            <p:txEl>
+                                              <p:pRg st="4" end="4"/>
+                                            </p:txEl>
+                                          </p:spTgt>
+                                        </p:tgtEl>
+                                        <p:attrNameLst>
+                                          <p:attrName>style.visibility</p:attrName>
+                                        </p:attrNameLst>
+                                      </p:cBhvr>
+                                      <p:to>
+                                        <p:strVal val="visible"/>
+                                      </p:to>
+                                    </p:set>
+                                  </p:childTnLst>
+                                </p:cTn>
+                              </p:par>
+                              <p:par>
+                                <p:cTn id="17" presetID="1" presetClass="entr" presetSubtype="0" fill="hold" nodeType="withEffect">
+                                  <p:stCondLst>
+                                    <p:cond delay="0"/>
+                                  </p:stCondLst>
+                                  <p:childTnLst>
+                                    <p:set>
+                                      <p:cBhvr>
+                                        <p:cTn id="18" dur="1" fill="hold">
+                                          <p:stCondLst>
+                                            <p:cond delay="0"/>
+                                          </p:stCondLst>
+                                        </p:cTn>
+                                        <p:tgtEl>
+                                          <p:spTgt spid="5"/>
+                                        </p:tgtEl>
+                                        <p:attrNameLst>
+                                          <p:attrName>style.visibility</p:attrName>
+                                        </p:attrNameLst>
+                                      </p:cBhvr>
+                                      <p:to>
+                                        <p:strVal val="visible"/>
+                                      </p:to>
+                                    </p:set>
+                                  </p:childTnLst>
+                                </p:cTn>
+                              </p:par>
+                            </p:childTnLst>
+                          </p:cTn>
+                        </p:par>
+                      </p:childTnLst>
+                    </p:cTn>
+                  </p:par>
+                  <p:par>
+                    <p:cTn id="19" fill="hold">
+                      <p:stCondLst>
+                        <p:cond delay="indefinite"/>
+                      </p:stCondLst>
+                      <p:childTnLst>
+                        <p:par>
+                          <p:cTn id="20" fill="hold">
+                            <p:stCondLst>
+                              <p:cond delay="0"/>
+                            </p:stCondLst>
+                            <p:childTnLst>
+                              <p:par>
+                                <p:cTn id="21" presetID="1" presetClass="entr" presetSubtype="0" fill="hold" nodeType="clickEffect">
+                                  <p:stCondLst>
+                                    <p:cond delay="0"/>
+                                  </p:stCondLst>
+                                  <p:childTnLst>
+                                    <p:set>
+                                      <p:cBhvr>
+                                        <p:cTn id="22" dur="1" fill="hold">
+                                          <p:stCondLst>
+                                            <p:cond delay="0"/>
+                                          </p:stCondLst>
+                                        </p:cTn>
+                                        <p:tgtEl>
+                                          <p:spTgt spid="3">
+                                            <p:txEl>
+                                              <p:pRg st="5" end="5"/>
+                                            </p:txEl>
+                                          </p:spTgt>
+                                        </p:tgtEl>
+                                        <p:attrNameLst>
+                                          <p:attrName>style.visibility</p:attrName>
+                                        </p:attrNameLst>
+                                      </p:cBhvr>
+                                      <p:to>
+                                        <p:strVal val="visible"/>
+                                      </p:to>
+                                    </p:set>
+                                  </p:childTnLst>
+                                </p:cTn>
+                              </p:par>
+                            </p:childTnLst>
+                          </p:cTn>
+                        </p:par>
+                      </p:childTnLst>
+                    </p:cTn>
+                  </p:par>
+                  <p:par>
+                    <p:cTn id="23" fill="hold">
+                      <p:stCondLst>
+                        <p:cond delay="indefinite"/>
+                      </p:stCondLst>
+                      <p:childTnLst>
+                        <p:par>
+                          <p:cTn id="24" fill="hold">
+                            <p:stCondLst>
+                              <p:cond delay="0"/>
+                            </p:stCondLst>
+                            <p:childTnLst>
+                              <p:par>
+                                <p:cTn id="25" presetID="1" presetClass="entr" presetSubtype="0" fill="hold" nodeType="clickEffect">
+                                  <p:stCondLst>
+                                    <p:cond delay="0"/>
+                                  </p:stCondLst>
+                                  <p:childTnLst>
+                                    <p:set>
+                                      <p:cBhvr>
+                                        <p:cTn id="26" dur="1" fill="hold">
+                                          <p:stCondLst>
+                                            <p:cond delay="0"/>
+                                          </p:stCondLst>
+                                        </p:cTn>
+                                        <p:tgtEl>
+                                          <p:spTgt spid="3">
+                                            <p:txEl>
+                                              <p:pRg st="6" end="6"/>
+                                            </p:txEl>
+                                          </p:spTgt>
+                                        </p:tgtEl>
+                                        <p:attrNameLst>
+                                          <p:attrName>style.visibility</p:attrName>
+                                        </p:attrNameLst>
+                                      </p:cBhvr>
+                                      <p:to>
+                                        <p:strVal val="visible"/>
+                                      </p:to>
+                                    </p:set>
+                                  </p:childTnLst>
+                                </p:cTn>
+                              </p:par>
+                            </p:childTnLst>
+                          </p:cTn>
+                        </p:par>
+                      </p:childTnLst>
+                    </p:cTn>
+                  </p:par>
+                  <p:par>
+                    <p:cTn id="27" fill="hold">
+                      <p:stCondLst>
+                        <p:cond delay="indefinite"/>
+                      </p:stCondLst>
+                      <p:childTnLst>
+                        <p:par>
+                          <p:cTn id="28" fill="hold">
+                            <p:stCondLst>
+                              <p:cond delay="0"/>
+                            </p:stCondLst>
+                            <p:childTnLst>
+                              <p:par>
+                                <p:cTn id="29" presetID="1" presetClass="entr" presetSubtype="0" fill="hold" nodeType="clickEffect">
+                                  <p:stCondLst>
+                                    <p:cond delay="0"/>
+                                  </p:stCondLst>
+                                  <p:childTnLst>
+                                    <p:set>
+                                      <p:cBhvr>
+                                        <p:cTn id="30" dur="1" fill="hold">
+                                          <p:stCondLst>
+                                            <p:cond delay="0"/>
+                                          </p:stCondLst>
+                                        </p:cTn>
+                                        <p:tgtEl>
+                                          <p:spTgt spid="3">
+                                            <p:txEl>
+                                              <p:pRg st="7" end="7"/>
+                                            </p:txEl>
+                                          </p:spTgt>
+                                        </p:tgtEl>
+                                        <p:attrNameLst>
+                                          <p:attrName>style.visibility</p:attrName>
+                                        </p:attrNameLst>
+                                      </p:cBhvr>
+                                      <p:to>
+                                        <p:strVal val="visible"/>
+                                      </p:to>
+                                    </p:set>
+                                  </p:childTnLst>
+                                </p:cTn>
+                              </p:par>
+                            </p:childTnLst>
+                          </p:cTn>
+                        </p:par>
+                      </p:childTnLst>
+                    </p:cTn>
+                  </p:par>
+                </p:childTnLst>
+              </p:cTn>
+              <p:prevCondLst>
+                <p:cond evt="onPrev" delay="0">
+                  <p:tgtEl>
+                    <p:sldTgt/>
+                  </p:tgtEl>
+                </p:cond>
+              </p:prevCondLst>
+              <p:nextCondLst>
+                <p:cond evt="onNext" delay="0">
+                  <p:tgtEl>
+                    <p:sldTgt/>
+                  </p:tgtEl>
+                </p:cond>
+              </p:nextCondLst>
+            </p:seq>
+          </p:childTnLst>
+        </p:cTn>
+      </p:par>
+    </p:tnLst>
+  </p:timing>
 </p:sld>
 </file>
 
@@ -5398,7 +6238,7 @@
         </p:nvSpPr>
         <p:spPr>
           <a:xfrm>
-            <a:off x="838200" y="1825625"/>
+            <a:off x="838200" y="1964521"/>
             <a:ext cx="5750052" cy="4351338"/>
           </a:xfrm>
         </p:spPr>
@@ -5447,22 +6287,27 @@
             </a:r>
           </a:p>
           <a:p>
+            <a:pPr>
+              <a:buFont typeface="Aptos" panose="020B0004020202020204" pitchFamily="34" charset="0"/>
+              <a:buChar char="→"/>
+            </a:pPr>
             <a:r>
               <a:rPr lang="en-US" dirty="0">
                 <a:sym typeface="Wingdings" panose="05000000000000000000" pitchFamily="2" charset="2"/>
               </a:rPr>
-              <a:t> Usually, a try and error process:</a:t>
-            </a:r>
-            <a:br>
+              <a:t>Usually, a try and error process:</a:t>
+            </a:r>
+          </a:p>
+          <a:p>
+            <a:pPr>
+              <a:buFont typeface="Aptos" panose="020B0004020202020204" pitchFamily="34" charset="0"/>
+              <a:buChar char="→"/>
+            </a:pPr>
+            <a:r>
               <a:rPr lang="en-US" dirty="0">
                 <a:sym typeface="Wingdings" panose="05000000000000000000" pitchFamily="2" charset="2"/>
               </a:rPr>
-            </a:br>
-            <a:r>
-              <a:rPr lang="en-US" dirty="0">
-                <a:sym typeface="Wingdings" panose="05000000000000000000" pitchFamily="2" charset="2"/>
-              </a:rPr>
-              <a:t> No universal method </a:t>
+              <a:t>No universal method </a:t>
             </a:r>
             <a:endParaRPr lang="en-US" dirty="0"/>
           </a:p>
@@ -5490,7 +6335,7 @@
         </p:blipFill>
         <p:spPr>
           <a:xfrm>
-            <a:off x="6652185" y="1535240"/>
+            <a:off x="6710058" y="1967415"/>
             <a:ext cx="5242283" cy="3445771"/>
           </a:xfrm>
           <a:prstGeom prst="rect">
@@ -5508,6 +6353,134 @@
   <p:clrMapOvr>
     <a:masterClrMapping/>
   </p:clrMapOvr>
+  <p:timing>
+    <p:tnLst>
+      <p:par>
+        <p:cTn id="1" dur="indefinite" restart="never" nodeType="tmRoot">
+          <p:childTnLst>
+            <p:seq concurrent="1" nextAc="seek">
+              <p:cTn id="2" dur="indefinite" nodeType="mainSeq">
+                <p:childTnLst>
+                  <p:par>
+                    <p:cTn id="3" fill="hold">
+                      <p:stCondLst>
+                        <p:cond delay="indefinite"/>
+                      </p:stCondLst>
+                      <p:childTnLst>
+                        <p:par>
+                          <p:cTn id="4" fill="hold">
+                            <p:stCondLst>
+                              <p:cond delay="0"/>
+                            </p:stCondLst>
+                            <p:childTnLst>
+                              <p:par>
+                                <p:cTn id="5" presetID="1" presetClass="entr" presetSubtype="0" fill="hold" nodeType="clickEffect">
+                                  <p:stCondLst>
+                                    <p:cond delay="0"/>
+                                  </p:stCondLst>
+                                  <p:childTnLst>
+                                    <p:set>
+                                      <p:cBhvr>
+                                        <p:cTn id="6" dur="1" fill="hold">
+                                          <p:stCondLst>
+                                            <p:cond delay="0"/>
+                                          </p:stCondLst>
+                                        </p:cTn>
+                                        <p:tgtEl>
+                                          <p:spTgt spid="3">
+                                            <p:txEl>
+                                              <p:pRg st="6" end="6"/>
+                                            </p:txEl>
+                                          </p:spTgt>
+                                        </p:tgtEl>
+                                        <p:attrNameLst>
+                                          <p:attrName>style.visibility</p:attrName>
+                                        </p:attrNameLst>
+                                      </p:cBhvr>
+                                      <p:to>
+                                        <p:strVal val="visible"/>
+                                      </p:to>
+                                    </p:set>
+                                  </p:childTnLst>
+                                </p:cTn>
+                              </p:par>
+                            </p:childTnLst>
+                          </p:cTn>
+                        </p:par>
+                      </p:childTnLst>
+                    </p:cTn>
+                  </p:par>
+                  <p:par>
+                    <p:cTn id="7" fill="hold">
+                      <p:stCondLst>
+                        <p:cond delay="indefinite"/>
+                      </p:stCondLst>
+                      <p:childTnLst>
+                        <p:par>
+                          <p:cTn id="8" fill="hold">
+                            <p:stCondLst>
+                              <p:cond delay="0"/>
+                            </p:stCondLst>
+                            <p:childTnLst>
+                              <p:par>
+                                <p:cTn id="9" presetID="1" presetClass="entr" presetSubtype="0" fill="hold" nodeType="clickEffect">
+                                  <p:stCondLst>
+                                    <p:cond delay="0"/>
+                                  </p:stCondLst>
+                                  <p:childTnLst>
+                                    <p:set>
+                                      <p:cBhvr>
+                                        <p:cTn id="10" dur="1" fill="hold">
+                                          <p:stCondLst>
+                                            <p:cond delay="0"/>
+                                          </p:stCondLst>
+                                        </p:cTn>
+                                        <p:tgtEl>
+                                          <p:spTgt spid="3">
+                                            <p:txEl>
+                                              <p:pRg st="7" end="7"/>
+                                            </p:txEl>
+                                          </p:spTgt>
+                                        </p:tgtEl>
+                                        <p:attrNameLst>
+                                          <p:attrName>style.visibility</p:attrName>
+                                        </p:attrNameLst>
+                                      </p:cBhvr>
+                                      <p:to>
+                                        <p:strVal val="visible"/>
+                                      </p:to>
+                                    </p:set>
+                                  </p:childTnLst>
+                                </p:cTn>
+                              </p:par>
+                            </p:childTnLst>
+                          </p:cTn>
+                        </p:par>
+                      </p:childTnLst>
+                    </p:cTn>
+                  </p:par>
+                </p:childTnLst>
+              </p:cTn>
+              <p:prevCondLst>
+                <p:cond evt="onPrev" delay="0">
+                  <p:tgtEl>
+                    <p:sldTgt/>
+                  </p:tgtEl>
+                </p:cond>
+              </p:prevCondLst>
+              <p:nextCondLst>
+                <p:cond evt="onNext" delay="0">
+                  <p:tgtEl>
+                    <p:sldTgt/>
+                  </p:tgtEl>
+                </p:cond>
+              </p:nextCondLst>
+            </p:seq>
+          </p:childTnLst>
+        </p:cTn>
+      </p:par>
+    </p:tnLst>
+  </p:timing>
 </p:sld>
 </file>
 
@@ -5607,25 +6580,29 @@
               <a:rPr lang="en-US" dirty="0"/>
               <a:t>Only machine readable:</a:t>
             </a:r>
-            <a:br>
-              <a:rPr lang="en-US" dirty="0"/>
-            </a:br>
+          </a:p>
+          <a:p>
+            <a:pPr lvl="1">
+              <a:buFont typeface="Aptos" panose="020B0004020202020204" pitchFamily="34" charset="0"/>
+              <a:buChar char="→"/>
+            </a:pPr>
             <a:r>
               <a:rPr lang="en-US" dirty="0">
                 <a:sym typeface="Wingdings" panose="05000000000000000000" pitchFamily="2" charset="2"/>
               </a:rPr>
-              <a:t> Faster</a:t>
-            </a:r>
-            <a:br>
+              <a:t>Faster</a:t>
+            </a:r>
+          </a:p>
+          <a:p>
+            <a:pPr lvl="1">
+              <a:buFont typeface="Aptos" panose="020B0004020202020204" pitchFamily="34" charset="0"/>
+              <a:buChar char="→"/>
+            </a:pPr>
+            <a:r>
               <a:rPr lang="en-US" dirty="0">
                 <a:sym typeface="Wingdings" panose="05000000000000000000" pitchFamily="2" charset="2"/>
               </a:rPr>
-            </a:br>
-            <a:r>
-              <a:rPr lang="en-US" dirty="0">
-                <a:sym typeface="Wingdings" panose="05000000000000000000" pitchFamily="2" charset="2"/>
-              </a:rPr>
-              <a:t> Error proof</a:t>
+              <a:t>Error proof</a:t>
             </a:r>
           </a:p>
         </p:txBody>
@@ -5774,6 +6751,174 @@
   <p:clrMapOvr>
     <a:masterClrMapping/>
   </p:clrMapOvr>
+  <p:timing>
+    <p:tnLst>
+      <p:par>
+        <p:cTn id="1" dur="indefinite" restart="never" nodeType="tmRoot">
+          <p:childTnLst>
+            <p:seq concurrent="1" nextAc="seek">
+              <p:cTn id="2" dur="indefinite" nodeType="mainSeq">
+                <p:childTnLst>
+                  <p:par>
+                    <p:cTn id="3" fill="hold">
+                      <p:stCondLst>
+                        <p:cond delay="indefinite"/>
+                      </p:stCondLst>
+                      <p:childTnLst>
+                        <p:par>
+                          <p:cTn id="4" fill="hold">
+                            <p:stCondLst>
+                              <p:cond delay="0"/>
+                            </p:stCondLst>
+                            <p:childTnLst>
+                              <p:par>
+                                <p:cTn id="5" presetID="1" presetClass="entr" presetSubtype="0" fill="hold" nodeType="clickEffect">
+                                  <p:stCondLst>
+                                    <p:cond delay="0"/>
+                                  </p:stCondLst>
+                                  <p:childTnLst>
+                                    <p:set>
+                                      <p:cBhvr>
+                                        <p:cTn id="6" dur="1" fill="hold">
+                                          <p:stCondLst>
+                                            <p:cond delay="0"/>
+                                          </p:stCondLst>
+                                        </p:cTn>
+                                        <p:tgtEl>
+                                          <p:spTgt spid="3">
+                                            <p:txEl>
+                                              <p:pRg st="4" end="4"/>
+                                            </p:txEl>
+                                          </p:spTgt>
+                                        </p:tgtEl>
+                                        <p:attrNameLst>
+                                          <p:attrName>style.visibility</p:attrName>
+                                        </p:attrNameLst>
+                                      </p:cBhvr>
+                                      <p:to>
+                                        <p:strVal val="visible"/>
+                                      </p:to>
+                                    </p:set>
+                                  </p:childTnLst>
+                                </p:cTn>
+                              </p:par>
+                              <p:par>
+                                <p:cTn id="7" presetID="1" presetClass="entr" presetSubtype="0" fill="hold" nodeType="withEffect">
+                                  <p:stCondLst>
+                                    <p:cond delay="0"/>
+                                  </p:stCondLst>
+                                  <p:childTnLst>
+                                    <p:set>
+                                      <p:cBhvr>
+                                        <p:cTn id="8" dur="1" fill="hold">
+                                          <p:stCondLst>
+                                            <p:cond delay="0"/>
+                                          </p:stCondLst>
+                                        </p:cTn>
+                                        <p:tgtEl>
+                                          <p:spTgt spid="3">
+                                            <p:txEl>
+                                              <p:pRg st="5" end="5"/>
+                                            </p:txEl>
+                                          </p:spTgt>
+                                        </p:tgtEl>
+                                        <p:attrNameLst>
+                                          <p:attrName>style.visibility</p:attrName>
+                                        </p:attrNameLst>
+                                      </p:cBhvr>
+                                      <p:to>
+                                        <p:strVal val="visible"/>
+                                      </p:to>
+                                    </p:set>
+                                  </p:childTnLst>
+                                </p:cTn>
+                              </p:par>
+                              <p:par>
+                                <p:cTn id="9" presetID="1" presetClass="entr" presetSubtype="0" fill="hold" nodeType="withEffect">
+                                  <p:stCondLst>
+                                    <p:cond delay="0"/>
+                                  </p:stCondLst>
+                                  <p:childTnLst>
+                                    <p:set>
+                                      <p:cBhvr>
+                                        <p:cTn id="10" dur="1" fill="hold">
+                                          <p:stCondLst>
+                                            <p:cond delay="0"/>
+                                          </p:stCondLst>
+                                        </p:cTn>
+                                        <p:tgtEl>
+                                          <p:spTgt spid="3">
+                                            <p:txEl>
+                                              <p:pRg st="6" end="6"/>
+                                            </p:txEl>
+                                          </p:spTgt>
+                                        </p:tgtEl>
+                                        <p:attrNameLst>
+                                          <p:attrName>style.visibility</p:attrName>
+                                        </p:attrNameLst>
+                                      </p:cBhvr>
+                                      <p:to>
+                                        <p:strVal val="visible"/>
+                                      </p:to>
+                                    </p:set>
+                                  </p:childTnLst>
+                                </p:cTn>
+                              </p:par>
+                              <p:par>
+                                <p:cTn id="11" presetID="1" presetClass="entr" presetSubtype="0" fill="hold" nodeType="withEffect">
+                                  <p:stCondLst>
+                                    <p:cond delay="0"/>
+                                  </p:stCondLst>
+                                  <p:childTnLst>
+                                    <p:set>
+                                      <p:cBhvr>
+                                        <p:cTn id="12" dur="1" fill="hold">
+                                          <p:stCondLst>
+                                            <p:cond delay="0"/>
+                                          </p:stCondLst>
+                                        </p:cTn>
+                                        <p:tgtEl>
+                                          <p:spTgt spid="8"/>
+                                        </p:tgtEl>
+                                        <p:attrNameLst>
+                                          <p:attrName>style.visibility</p:attrName>
+                                        </p:attrNameLst>
+                                      </p:cBhvr>
+                                      <p:to>
+                                        <p:strVal val="visible"/>
+                                      </p:to>
+                                    </p:set>
+                                  </p:childTnLst>
+                                </p:cTn>
+                              </p:par>
+                            </p:childTnLst>
+                          </p:cTn>
+                        </p:par>
+                      </p:childTnLst>
+                    </p:cTn>
+                  </p:par>
+                </p:childTnLst>
+              </p:cTn>
+              <p:prevCondLst>
+                <p:cond evt="onPrev" delay="0">
+                  <p:tgtEl>
+                    <p:sldTgt/>
+                  </p:tgtEl>
+                </p:cond>
+              </p:prevCondLst>
+              <p:nextCondLst>
+                <p:cond evt="onNext" delay="0">
+                  <p:tgtEl>
+                    <p:sldTgt/>
+                  </p:tgtEl>
+                </p:cond>
+              </p:nextCondLst>
+            </p:seq>
+          </p:childTnLst>
+        </p:cTn>
+      </p:par>
+    </p:tnLst>
+  </p:timing>
 </p:sld>
 </file>
 
@@ -5939,7 +7084,7 @@
         </p:blipFill>
         <p:spPr>
           <a:xfrm>
-            <a:off x="6955817" y="2011526"/>
+            <a:off x="6793771" y="1548539"/>
             <a:ext cx="4934531" cy="2563921"/>
           </a:xfrm>
           <a:prstGeom prst="rect">
@@ -5979,7 +7124,7 @@
         </p:blipFill>
         <p:spPr>
           <a:xfrm>
-            <a:off x="7115604" y="5234940"/>
+            <a:off x="7092455" y="5153918"/>
             <a:ext cx="4774744" cy="801356"/>
           </a:xfrm>
           <a:prstGeom prst="rect">
@@ -6007,6 +7152,130 @@
   <p:clrMapOvr>
     <a:masterClrMapping/>
   </p:clrMapOvr>
+  <p:timing>
+    <p:tnLst>
+      <p:par>
+        <p:cTn id="1" dur="indefinite" restart="never" nodeType="tmRoot">
+          <p:childTnLst>
+            <p:seq concurrent="1" nextAc="seek">
+              <p:cTn id="2" dur="indefinite" nodeType="mainSeq">
+                <p:childTnLst>
+                  <p:par>
+                    <p:cTn id="3" fill="hold">
+                      <p:stCondLst>
+                        <p:cond delay="indefinite"/>
+                      </p:stCondLst>
+                      <p:childTnLst>
+                        <p:par>
+                          <p:cTn id="4" fill="hold">
+                            <p:stCondLst>
+                              <p:cond delay="0"/>
+                            </p:stCondLst>
+                            <p:childTnLst>
+                              <p:par>
+                                <p:cTn id="5" presetID="1" presetClass="entr" presetSubtype="0" fill="hold" nodeType="clickEffect">
+                                  <p:stCondLst>
+                                    <p:cond delay="0"/>
+                                  </p:stCondLst>
+                                  <p:childTnLst>
+                                    <p:set>
+                                      <p:cBhvr>
+                                        <p:cTn id="6" dur="1" fill="hold">
+                                          <p:stCondLst>
+                                            <p:cond delay="0"/>
+                                          </p:stCondLst>
+                                        </p:cTn>
+                                        <p:tgtEl>
+                                          <p:spTgt spid="3">
+                                            <p:txEl>
+                                              <p:pRg st="7" end="7"/>
+                                            </p:txEl>
+                                          </p:spTgt>
+                                        </p:tgtEl>
+                                        <p:attrNameLst>
+                                          <p:attrName>style.visibility</p:attrName>
+                                        </p:attrNameLst>
+                                      </p:cBhvr>
+                                      <p:to>
+                                        <p:strVal val="visible"/>
+                                      </p:to>
+                                    </p:set>
+                                  </p:childTnLst>
+                                </p:cTn>
+                              </p:par>
+                            </p:childTnLst>
+                          </p:cTn>
+                        </p:par>
+                      </p:childTnLst>
+                    </p:cTn>
+                  </p:par>
+                  <p:par>
+                    <p:cTn id="7" fill="hold">
+                      <p:stCondLst>
+                        <p:cond delay="indefinite"/>
+                      </p:stCondLst>
+                      <p:childTnLst>
+                        <p:par>
+                          <p:cTn id="8" fill="hold">
+                            <p:stCondLst>
+                              <p:cond delay="0"/>
+                            </p:stCondLst>
+                            <p:childTnLst>
+                              <p:par>
+                                <p:cTn id="9" presetID="1" presetClass="entr" presetSubtype="0" fill="hold" nodeType="clickEffect">
+                                  <p:stCondLst>
+                                    <p:cond delay="0"/>
+                                  </p:stCondLst>
+                                  <p:childTnLst>
+                                    <p:set>
+                                      <p:cBhvr>
+                                        <p:cTn id="10" dur="1" fill="hold">
+                                          <p:stCondLst>
+                                            <p:cond delay="0"/>
+                                          </p:stCondLst>
+                                        </p:cTn>
+                                        <p:tgtEl>
+                                          <p:spTgt spid="7"/>
+                                        </p:tgtEl>
+                                        <p:attrNameLst>
+                                          <p:attrName>style.visibility</p:attrName>
+                                        </p:attrNameLst>
+                                      </p:cBhvr>
+                                      <p:to>
+                                        <p:strVal val="visible"/>
+                                      </p:to>
+                                    </p:set>
+                                  </p:childTnLst>
+                                </p:cTn>
+                              </p:par>
+                            </p:childTnLst>
+                          </p:cTn>
+                        </p:par>
+                      </p:childTnLst>
+                    </p:cTn>
+                  </p:par>
+                </p:childTnLst>
+              </p:cTn>
+              <p:prevCondLst>
+                <p:cond evt="onPrev" delay="0">
+                  <p:tgtEl>
+                    <p:sldTgt/>
+                  </p:tgtEl>
+                </p:cond>
+              </p:prevCondLst>
+              <p:nextCondLst>
+                <p:cond evt="onNext" delay="0">
+                  <p:tgtEl>
+                    <p:sldTgt/>
+                  </p:tgtEl>
+                </p:cond>
+              </p:nextCondLst>
+            </p:seq>
+          </p:childTnLst>
+        </p:cTn>
+      </p:par>
+    </p:tnLst>
+  </p:timing>
 </p:sld>
 </file>
 
@@ -6045,7 +7314,7 @@
         </p:nvSpPr>
         <p:spPr>
           <a:xfrm>
-            <a:off x="838200" y="1308703"/>
+            <a:off x="838200" y="938002"/>
             <a:ext cx="10515600" cy="1325563"/>
           </a:xfrm>
         </p:spPr>
@@ -6091,7 +7360,7 @@
         </p:blipFill>
         <p:spPr>
           <a:xfrm>
-            <a:off x="4387956" y="2603905"/>
+            <a:off x="4371240" y="2263565"/>
             <a:ext cx="3416088" cy="3920339"/>
           </a:xfrm>
           <a:prstGeom prst="rect">
@@ -6113,7 +7382,7 @@
         </p:nvSpPr>
         <p:spPr>
           <a:xfrm>
-            <a:off x="4311148" y="6524244"/>
+            <a:off x="4294432" y="6183904"/>
             <a:ext cx="7059368" cy="276999"/>
           </a:xfrm>
           <a:prstGeom prst="rect">
